--- a/0330_additional/0330_DH_Steel_IBA_분석보고서.pptx
+++ b/0330_additional/0330_DH_Steel_IBA_분석보고서.pptx
@@ -8668,22 +8668,22 @@
       </p:sp>
       <p:pic>
         <p:nvPicPr>
-          <p:cNvPr id="3" name="Picture 2" descr="dashboard_completion.png"/>
+          <p:cNvPr id="3" name="Picture 2" descr="customer_requirements_table.png"/>
           <p:cNvPicPr>
             <a:picLocks noChangeAspect="1"/>
           </p:cNvPicPr>
           <p:nvPr/>
         </p:nvPicPr>
         <p:blipFill>
-          <a:blip r:embed="rId2"/>
+          <a:blip r:embed="rId3"/>
           <a:stretch>
             <a:fillRect/>
           </a:stretch>
         </p:blipFill>
         <p:spPr>
           <a:xfrm>
-            <a:off x="274320" y="1280160"/>
-            <a:ext cx="11612880" cy="4901359"/>
+            <a:off x="457200" y="2286000"/>
+            <a:ext cx="11277295" cy="3607385"/>
           </a:xfrm>
           <a:prstGeom prst="rect">
             <a:avLst/>

--- a/0330_additional/0330_DH_Steel_IBA_분석보고서.pptx
+++ b/0330_additional/0330_DH_Steel_IBA_분석보고서.pptx
@@ -8666,30 +8666,550 @@
           </a:p>
         </p:txBody>
       </p:sp>
-      <p:pic>
-        <p:nvPicPr>
-          <p:cNvPr id="3" name="Picture 2" descr="customer_requirements_table.png"/>
-          <p:cNvPicPr>
-            <a:picLocks noChangeAspect="1"/>
-          </p:cNvPicPr>
+      <p:graphicFrame>
+        <p:nvGraphicFramePr>
+          <p:cNvPr id="3" name="Table 2"/>
+          <p:cNvGraphicFramePr>
+            <a:graphicFrameLocks noGrp="1"/>
+          </p:cNvGraphicFramePr>
           <p:nvPr/>
-        </p:nvPicPr>
-        <p:blipFill>
-          <a:blip r:embed="rId3"/>
-          <a:stretch>
-            <a:fillRect/>
-          </a:stretch>
-        </p:blipFill>
-        <p:spPr>
-          <a:xfrm>
-            <a:off x="457200" y="2286000"/>
-            <a:ext cx="11277295" cy="3607385"/>
-          </a:xfrm>
-          <a:prstGeom prst="rect">
-            <a:avLst/>
-          </a:prstGeom>
-        </p:spPr>
-      </p:pic>
+        </p:nvGraphicFramePr>
+        <p:xfrm>
+          <a:off x="380847" y="1828800"/>
+          <a:ext cx="11430000" cy="3657600"/>
+        </p:xfrm>
+        <a:graphic>
+          <a:graphicData uri="http://schemas.openxmlformats.org/drawingml/2006/table">
+            <a:tbl>
+              <a:tblPr firstRow="1" bandRow="1">
+                <a:tableStyleId>{5C22544A-7EE6-4342-B048-85BDC9FD1C3A}</a:tableStyleId>
+              </a:tblPr>
+              <a:tblGrid>
+                <a:gridCol w="640080"/>
+                <a:gridCol w="4572000"/>
+                <a:gridCol w="914400"/>
+                <a:gridCol w="5303520"/>
+              </a:tblGrid>
+              <a:tr h="609600">
+                <a:tc>
+                  <a:txBody>
+                    <a:bodyPr/>
+                    <a:lstStyle/>
+                    <a:p>
+                      <a:pPr algn="ctr">
+                        <a:defRPr sz="1100" b="1">
+                          <a:solidFill>
+                            <a:srgbClr val="FFFFFF"/>
+                          </a:solidFill>
+                        </a:defRPr>
+                      </a:pPr>
+                      <a:r>
+                        <a:t>#</a:t>
+                      </a:r>
+                    </a:p>
+                  </a:txBody>
+                  <a:tcPr marL="73152" marR="73152" marT="36576" marB="36576">
+                    <a:solidFill>
+                      <a:srgbClr val="1B2A4A"/>
+                    </a:solidFill>
+                  </a:tcPr>
+                </a:tc>
+                <a:tc>
+                  <a:txBody>
+                    <a:bodyPr/>
+                    <a:lstStyle/>
+                    <a:p>
+                      <a:pPr algn="ctr">
+                        <a:defRPr sz="1100" b="1">
+                          <a:solidFill>
+                            <a:srgbClr val="FFFFFF"/>
+                          </a:solidFill>
+                        </a:defRPr>
+                      </a:pPr>
+                      <a:r>
+                        <a:t>요구사항</a:t>
+                      </a:r>
+                    </a:p>
+                  </a:txBody>
+                  <a:tcPr marL="73152" marR="73152" marT="36576" marB="36576">
+                    <a:solidFill>
+                      <a:srgbClr val="1B2A4A"/>
+                    </a:solidFill>
+                  </a:tcPr>
+                </a:tc>
+                <a:tc>
+                  <a:txBody>
+                    <a:bodyPr/>
+                    <a:lstStyle/>
+                    <a:p>
+                      <a:pPr algn="ctr">
+                        <a:defRPr sz="1100" b="1">
+                          <a:solidFill>
+                            <a:srgbClr val="FFFFFF"/>
+                          </a:solidFill>
+                        </a:defRPr>
+                      </a:pPr>
+                      <a:r>
+                        <a:t>완료도</a:t>
+                      </a:r>
+                    </a:p>
+                  </a:txBody>
+                  <a:tcPr marL="73152" marR="73152" marT="36576" marB="36576">
+                    <a:solidFill>
+                      <a:srgbClr val="1B2A4A"/>
+                    </a:solidFill>
+                  </a:tcPr>
+                </a:tc>
+                <a:tc>
+                  <a:txBody>
+                    <a:bodyPr/>
+                    <a:lstStyle/>
+                    <a:p>
+                      <a:pPr algn="ctr">
+                        <a:defRPr sz="1100" b="1">
+                          <a:solidFill>
+                            <a:srgbClr val="FFFFFF"/>
+                          </a:solidFill>
+                        </a:defRPr>
+                      </a:pPr>
+                      <a:r>
+                        <a:t>핵심 산출물</a:t>
+                      </a:r>
+                    </a:p>
+                  </a:txBody>
+                  <a:tcPr marL="73152" marR="73152" marT="36576" marB="36576">
+                    <a:solidFill>
+                      <a:srgbClr val="1B2A4A"/>
+                    </a:solidFill>
+                  </a:tcPr>
+                </a:tc>
+              </a:tr>
+              <a:tr h="609600">
+                <a:tc>
+                  <a:txBody>
+                    <a:bodyPr/>
+                    <a:lstStyle/>
+                    <a:p>
+                      <a:pPr algn="ctr">
+                        <a:defRPr sz="1100">
+                          <a:solidFill>
+                            <a:srgbClr val="34495E"/>
+                          </a:solidFill>
+                        </a:defRPr>
+                      </a:pPr>
+                      <a:r>
+                        <a:t>5</a:t>
+                      </a:r>
+                    </a:p>
+                  </a:txBody>
+                  <a:tcPr marL="73152" marR="73152" marT="36576" marB="36576"/>
+                </a:tc>
+                <a:tc>
+                  <a:txBody>
+                    <a:bodyPr/>
+                    <a:lstStyle/>
+                    <a:p>
+                      <a:pPr>
+                        <a:defRPr sz="1100">
+                          <a:solidFill>
+                            <a:srgbClr val="34495E"/>
+                          </a:solidFill>
+                        </a:defRPr>
+                      </a:pPr>
+                      <a:r>
+                        <a:t>ML vs 통계 순위 불일치 해소 (가장 중요)</a:t>
+                      </a:r>
+                    </a:p>
+                  </a:txBody>
+                  <a:tcPr marL="73152" marR="73152" marT="36576" marB="36576"/>
+                </a:tc>
+                <a:tc>
+                  <a:txBody>
+                    <a:bodyPr/>
+                    <a:lstStyle/>
+                    <a:p>
+                      <a:pPr algn="ctr">
+                        <a:defRPr sz="1100">
+                          <a:solidFill>
+                            <a:srgbClr val="34495E"/>
+                          </a:solidFill>
+                        </a:defRPr>
+                      </a:pPr>
+                      <a:r>
+                        <a:t>95%</a:t>
+                      </a:r>
+                    </a:p>
+                  </a:txBody>
+                  <a:tcPr marL="73152" marR="73152" marT="36576" marB="36576"/>
+                </a:tc>
+                <a:tc>
+                  <a:txBody>
+                    <a:bodyPr/>
+                    <a:lstStyle/>
+                    <a:p>
+                      <a:pPr>
+                        <a:defRPr sz="1100">
+                          <a:solidFill>
+                            <a:srgbClr val="34495E"/>
+                          </a:solidFill>
+                        </a:defRPr>
+                      </a:pPr>
+                      <a:r>
+                        <a:t>통합 순위표, 반증 사례 11건, SHAP 차트 3종</a:t>
+                      </a:r>
+                    </a:p>
+                  </a:txBody>
+                  <a:tcPr marL="73152" marR="73152" marT="36576" marB="36576"/>
+                </a:tc>
+              </a:tr>
+              <a:tr h="609600">
+                <a:tc>
+                  <a:txBody>
+                    <a:bodyPr/>
+                    <a:lstStyle/>
+                    <a:p>
+                      <a:pPr algn="ctr">
+                        <a:defRPr sz="1100">
+                          <a:solidFill>
+                            <a:srgbClr val="34495E"/>
+                          </a:solidFill>
+                        </a:defRPr>
+                      </a:pPr>
+                      <a:r>
+                        <a:t>1+2</a:t>
+                      </a:r>
+                    </a:p>
+                  </a:txBody>
+                  <a:tcPr marL="73152" marR="73152" marT="36576" marB="36576">
+                    <a:solidFill>
+                      <a:srgbClr val="EBF5FB"/>
+                    </a:solidFill>
+                  </a:tcPr>
+                </a:tc>
+                <a:tc>
+                  <a:txBody>
+                    <a:bodyPr/>
+                    <a:lstStyle/>
+                    <a:p>
+                      <a:pPr>
+                        <a:defRPr sz="1100">
+                          <a:solidFill>
+                            <a:srgbClr val="34495E"/>
+                          </a:solidFill>
+                        </a:defRPr>
+                      </a:pPr>
+                      <a:r>
+                        <a:t>인과관계 + 가열로 vs 토크 선후관계</a:t>
+                      </a:r>
+                    </a:p>
+                  </a:txBody>
+                  <a:tcPr marL="73152" marR="73152" marT="36576" marB="36576">
+                    <a:solidFill>
+                      <a:srgbClr val="EBF5FB"/>
+                    </a:solidFill>
+                  </a:tcPr>
+                </a:tc>
+                <a:tc>
+                  <a:txBody>
+                    <a:bodyPr/>
+                    <a:lstStyle/>
+                    <a:p>
+                      <a:pPr algn="ctr">
+                        <a:defRPr sz="1100">
+                          <a:solidFill>
+                            <a:srgbClr val="34495E"/>
+                          </a:solidFill>
+                        </a:defRPr>
+                      </a:pPr>
+                      <a:r>
+                        <a:t>85%</a:t>
+                      </a:r>
+                    </a:p>
+                  </a:txBody>
+                  <a:tcPr marL="73152" marR="73152" marT="36576" marB="36576">
+                    <a:solidFill>
+                      <a:srgbClr val="EBF5FB"/>
+                    </a:solidFill>
+                  </a:tcPr>
+                </a:tc>
+                <a:tc>
+                  <a:txBody>
+                    <a:bodyPr/>
+                    <a:lstStyle/>
+                    <a:p>
+                      <a:pPr>
+                        <a:defRPr sz="1100">
+                          <a:solidFill>
+                            <a:srgbClr val="34495E"/>
+                          </a:solidFill>
+                        </a:defRPr>
+                      </a:pPr>
+                      <a:r>
+                        <a:t>CCF 10쌍, Stand 8 분석, 공정 흐름도</a:t>
+                      </a:r>
+                    </a:p>
+                  </a:txBody>
+                  <a:tcPr marL="73152" marR="73152" marT="36576" marB="36576">
+                    <a:solidFill>
+                      <a:srgbClr val="EBF5FB"/>
+                    </a:solidFill>
+                  </a:tcPr>
+                </a:tc>
+              </a:tr>
+              <a:tr h="609600">
+                <a:tc>
+                  <a:txBody>
+                    <a:bodyPr/>
+                    <a:lstStyle/>
+                    <a:p>
+                      <a:pPr algn="ctr">
+                        <a:defRPr sz="1100">
+                          <a:solidFill>
+                            <a:srgbClr val="34495E"/>
+                          </a:solidFill>
+                        </a:defRPr>
+                      </a:pPr>
+                      <a:r>
+                        <a:t>4</a:t>
+                      </a:r>
+                    </a:p>
+                  </a:txBody>
+                  <a:tcPr marL="73152" marR="73152" marT="36576" marB="36576"/>
+                </a:tc>
+                <a:tc>
+                  <a:txBody>
+                    <a:bodyPr/>
+                    <a:lstStyle/>
+                    <a:p>
+                      <a:pPr>
+                        <a:defRPr sz="1100">
+                          <a:solidFill>
+                            <a:srgbClr val="34495E"/>
+                          </a:solidFill>
+                        </a:defRPr>
+                      </a:pPr>
+                      <a:r>
+                        <a:t>Stand 14 &amp; 블록밀 재검토</a:t>
+                      </a:r>
+                    </a:p>
+                  </a:txBody>
+                  <a:tcPr marL="73152" marR="73152" marT="36576" marB="36576"/>
+                </a:tc>
+                <a:tc>
+                  <a:txBody>
+                    <a:bodyPr/>
+                    <a:lstStyle/>
+                    <a:p>
+                      <a:pPr algn="ctr">
+                        <a:defRPr sz="1100">
+                          <a:solidFill>
+                            <a:srgbClr val="34495E"/>
+                          </a:solidFill>
+                        </a:defRPr>
+                      </a:pPr>
+                      <a:r>
+                        <a:t>90%</a:t>
+                      </a:r>
+                    </a:p>
+                  </a:txBody>
+                  <a:tcPr marL="73152" marR="73152" marT="36576" marB="36576"/>
+                </a:tc>
+                <a:tc>
+                  <a:txBody>
+                    <a:bodyPr/>
+                    <a:lstStyle/>
+                    <a:p>
+                      <a:pPr>
+                        <a:defRPr sz="1100">
+                          <a:solidFill>
+                            <a:srgbClr val="34495E"/>
+                          </a:solidFill>
+                        </a:defRPr>
+                      </a:pPr>
+                      <a:r>
+                        <a:t>avg/std 구분, 불량 유형별 상관 분석</a:t>
+                      </a:r>
+                    </a:p>
+                  </a:txBody>
+                  <a:tcPr marL="73152" marR="73152" marT="36576" marB="36576"/>
+                </a:tc>
+              </a:tr>
+              <a:tr h="609600">
+                <a:tc>
+                  <a:txBody>
+                    <a:bodyPr/>
+                    <a:lstStyle/>
+                    <a:p>
+                      <a:pPr algn="ctr">
+                        <a:defRPr sz="1100">
+                          <a:solidFill>
+                            <a:srgbClr val="34495E"/>
+                          </a:solidFill>
+                        </a:defRPr>
+                      </a:pPr>
+                      <a:r>
+                        <a:t>3</a:t>
+                      </a:r>
+                    </a:p>
+                  </a:txBody>
+                  <a:tcPr marL="73152" marR="73152" marT="36576" marB="36576">
+                    <a:solidFill>
+                      <a:srgbClr val="EBF5FB"/>
+                    </a:solidFill>
+                  </a:tcPr>
+                </a:tc>
+                <a:tc>
+                  <a:txBody>
+                    <a:bodyPr/>
+                    <a:lstStyle/>
+                    <a:p>
+                      <a:pPr>
+                        <a:defRPr sz="1100">
+                          <a:solidFill>
+                            <a:srgbClr val="34495E"/>
+                          </a:solidFill>
+                        </a:defRPr>
+                      </a:pPr>
+                      <a:r>
+                        <a:t>설정값 Gap + 관리 기준</a:t>
+                      </a:r>
+                    </a:p>
+                  </a:txBody>
+                  <a:tcPr marL="73152" marR="73152" marT="36576" marB="36576">
+                    <a:solidFill>
+                      <a:srgbClr val="EBF5FB"/>
+                    </a:solidFill>
+                  </a:tcPr>
+                </a:tc>
+                <a:tc>
+                  <a:txBody>
+                    <a:bodyPr/>
+                    <a:lstStyle/>
+                    <a:p>
+                      <a:pPr algn="ctr">
+                        <a:defRPr sz="1100">
+                          <a:solidFill>
+                            <a:srgbClr val="34495E"/>
+                          </a:solidFill>
+                        </a:defRPr>
+                      </a:pPr>
+                      <a:r>
+                        <a:t>60%</a:t>
+                      </a:r>
+                    </a:p>
+                  </a:txBody>
+                  <a:tcPr marL="73152" marR="73152" marT="36576" marB="36576">
+                    <a:solidFill>
+                      <a:srgbClr val="EBF5FB"/>
+                    </a:solidFill>
+                  </a:tcPr>
+                </a:tc>
+                <a:tc>
+                  <a:txBody>
+                    <a:bodyPr/>
+                    <a:lstStyle/>
+                    <a:p>
+                      <a:pPr>
+                        <a:defRPr sz="1100">
+                          <a:solidFill>
+                            <a:srgbClr val="34495E"/>
+                          </a:solidFill>
+                        </a:defRPr>
+                      </a:pPr>
+                      <a:r>
+                        <a:t>대안 B(실측값 기반) 완료, 설정값 미확보</a:t>
+                      </a:r>
+                    </a:p>
+                  </a:txBody>
+                  <a:tcPr marL="73152" marR="73152" marT="36576" marB="36576">
+                    <a:solidFill>
+                      <a:srgbClr val="EBF5FB"/>
+                    </a:solidFill>
+                  </a:tcPr>
+                </a:tc>
+              </a:tr>
+              <a:tr h="609600">
+                <a:tc>
+                  <a:txBody>
+                    <a:bodyPr/>
+                    <a:lstStyle/>
+                    <a:p>
+                      <a:pPr algn="ctr">
+                        <a:defRPr sz="1100">
+                          <a:solidFill>
+                            <a:srgbClr val="34495E"/>
+                          </a:solidFill>
+                        </a:defRPr>
+                      </a:pPr>
+                      <a:r>
+                        <a:t>추가</a:t>
+                      </a:r>
+                    </a:p>
+                  </a:txBody>
+                  <a:tcPr marL="73152" marR="73152" marT="36576" marB="36576"/>
+                </a:tc>
+                <a:tc>
+                  <a:txBody>
+                    <a:bodyPr/>
+                    <a:lstStyle/>
+                    <a:p>
+                      <a:pPr>
+                        <a:defRPr sz="1100">
+                          <a:solidFill>
+                            <a:srgbClr val="34495E"/>
+                          </a:solidFill>
+                        </a:defRPr>
+                      </a:pPr>
+                      <a:r>
+                        <a:t>공정 흐름 방향성 + Stand 8</a:t>
+                      </a:r>
+                    </a:p>
+                  </a:txBody>
+                  <a:tcPr marL="73152" marR="73152" marT="36576" marB="36576"/>
+                </a:tc>
+                <a:tc>
+                  <a:txBody>
+                    <a:bodyPr/>
+                    <a:lstStyle/>
+                    <a:p>
+                      <a:pPr algn="ctr">
+                        <a:defRPr sz="1100">
+                          <a:solidFill>
+                            <a:srgbClr val="34495E"/>
+                          </a:solidFill>
+                        </a:defRPr>
+                      </a:pPr>
+                      <a:r>
+                        <a:t>80%</a:t>
+                      </a:r>
+                    </a:p>
+                  </a:txBody>
+                  <a:tcPr marL="73152" marR="73152" marT="36576" marB="36576"/>
+                </a:tc>
+                <a:tc>
+                  <a:txBody>
+                    <a:bodyPr/>
+                    <a:lstStyle/>
+                    <a:p>
+                      <a:pPr>
+                        <a:defRPr sz="1100">
+                          <a:solidFill>
+                            <a:srgbClr val="34495E"/>
+                          </a:solidFill>
+                        </a:defRPr>
+                      </a:pPr>
+                      <a:r>
+                        <a:t>물리적 lag 추정, 역방향 가설 검증</a:t>
+                      </a:r>
+                    </a:p>
+                  </a:txBody>
+                  <a:tcPr marL="73152" marR="73152" marT="36576" marB="36576"/>
+                </a:tc>
+              </a:tr>
+            </a:tbl>
+          </a:graphicData>
+        </a:graphic>
+      </p:graphicFrame>
     </p:spTree>
   </p:cSld>
   <p:clrMapOvr>
